--- a/presentation/The main lesson.pptx
+++ b/presentation/The main lesson.pptx
@@ -109,7 +109,87 @@
       </a:defRPr>
     </a:lvl9pPr>
   </p:defaultTextStyle>
+  <p:extLst>
+    <p:ext uri="{EFAFB233-063F-42B5-8137-9DF3F51BA10A}">
+      <p15:sldGuideLst xmlns:p15="http://schemas.microsoft.com/office/powerpoint/2012/main"/>
+    </p:ext>
+  </p:extLst>
 </p:presentation>
+</file>
+
+<file path=ppt/revisionInfo.xml><?xml version="1.0" encoding="utf-8"?>
+<p1510:revInfo xmlns:a="http://schemas.openxmlformats.org/drawingml/2006/main" xmlns:r="http://schemas.openxmlformats.org/officeDocument/2006/relationships" xmlns:p1510="http://schemas.microsoft.com/office/powerpoint/2015/10/main">
+  <p1510:revLst>
+    <p1510:client id="{D7A49E53-D16F-4F7F-84C0-A9B5FA19F733}" v="3" dt="2026-08-03T01:16:19.342"/>
+  </p1510:revLst>
+</p1510:revInfo>
+</file>
+
+<file path=ppt/changesInfos/changesInfo1.xml><?xml version="1.0" encoding="utf-8"?>
+<pc:chgInfo xmlns:a="http://schemas.openxmlformats.org/drawingml/2006/main" xmlns:r="http://schemas.openxmlformats.org/officeDocument/2006/relationships" xmlns:ac="http://schemas.microsoft.com/office/drawing/2013/main/command" xmlns:pc="http://schemas.microsoft.com/office/powerpoint/2013/main/command">
+  <pc:docChgLst>
+    <pc:chgData name="Jemma Little" userId="6e23c02541cfb0bd" providerId="LiveId" clId="{B71C111D-398C-466F-BDD7-B627A9C0CF12}"/>
+    <pc:docChg chg="undo custSel modSld">
+      <pc:chgData name="Jemma Little" userId="6e23c02541cfb0bd" providerId="LiveId" clId="{B71C111D-398C-466F-BDD7-B627A9C0CF12}" dt="2026-08-03T01:16:34.109" v="651" actId="20577"/>
+      <pc:docMkLst>
+        <pc:docMk/>
+      </pc:docMkLst>
+      <pc:sldChg chg="modSp mod">
+        <pc:chgData name="Jemma Little" userId="6e23c02541cfb0bd" providerId="LiveId" clId="{B71C111D-398C-466F-BDD7-B627A9C0CF12}" dt="2026-08-03T01:11:35.768" v="68" actId="20577"/>
+        <pc:sldMkLst>
+          <pc:docMk/>
+          <pc:sldMk cId="1731413787" sldId="258"/>
+        </pc:sldMkLst>
+        <pc:spChg chg="mod">
+          <ac:chgData name="Jemma Little" userId="6e23c02541cfb0bd" providerId="LiveId" clId="{B71C111D-398C-466F-BDD7-B627A9C0CF12}" dt="2026-08-03T01:11:35.768" v="68" actId="20577"/>
+          <ac:spMkLst>
+            <pc:docMk/>
+            <pc:sldMk cId="1731413787" sldId="258"/>
+            <ac:spMk id="3" creationId="{2BBEFCDB-5DAE-4281-F2EA-B4D3691037CF}"/>
+          </ac:spMkLst>
+        </pc:spChg>
+      </pc:sldChg>
+      <pc:sldChg chg="modSp mod">
+        <pc:chgData name="Jemma Little" userId="6e23c02541cfb0bd" providerId="LiveId" clId="{B71C111D-398C-466F-BDD7-B627A9C0CF12}" dt="2026-08-03T01:14:30.351" v="406" actId="20577"/>
+        <pc:sldMkLst>
+          <pc:docMk/>
+          <pc:sldMk cId="3320564778" sldId="259"/>
+        </pc:sldMkLst>
+        <pc:spChg chg="mod">
+          <ac:chgData name="Jemma Little" userId="6e23c02541cfb0bd" providerId="LiveId" clId="{B71C111D-398C-466F-BDD7-B627A9C0CF12}" dt="2026-08-03T01:11:58.510" v="85" actId="20577"/>
+          <ac:spMkLst>
+            <pc:docMk/>
+            <pc:sldMk cId="3320564778" sldId="259"/>
+            <ac:spMk id="2" creationId="{58150120-D0E9-266B-8A10-32F2BBE100D7}"/>
+          </ac:spMkLst>
+        </pc:spChg>
+        <pc:spChg chg="mod">
+          <ac:chgData name="Jemma Little" userId="6e23c02541cfb0bd" providerId="LiveId" clId="{B71C111D-398C-466F-BDD7-B627A9C0CF12}" dt="2026-08-03T01:14:30.351" v="406" actId="20577"/>
+          <ac:spMkLst>
+            <pc:docMk/>
+            <pc:sldMk cId="3320564778" sldId="259"/>
+            <ac:spMk id="3" creationId="{89684CE0-91F2-3C78-0D0C-DF7EC975BC36}"/>
+          </ac:spMkLst>
+        </pc:spChg>
+      </pc:sldChg>
+      <pc:sldChg chg="modSp mod">
+        <pc:chgData name="Jemma Little" userId="6e23c02541cfb0bd" providerId="LiveId" clId="{B71C111D-398C-466F-BDD7-B627A9C0CF12}" dt="2026-08-03T01:16:34.109" v="651" actId="20577"/>
+        <pc:sldMkLst>
+          <pc:docMk/>
+          <pc:sldMk cId="1546502522" sldId="260"/>
+        </pc:sldMkLst>
+        <pc:spChg chg="mod">
+          <ac:chgData name="Jemma Little" userId="6e23c02541cfb0bd" providerId="LiveId" clId="{B71C111D-398C-466F-BDD7-B627A9C0CF12}" dt="2026-08-03T01:16:34.109" v="651" actId="20577"/>
+          <ac:spMkLst>
+            <pc:docMk/>
+            <pc:sldMk cId="1546502522" sldId="260"/>
+            <ac:spMk id="3" creationId="{69E4F5C1-B1A8-18F2-DBCE-D6384DD1953E}"/>
+          </ac:spMkLst>
+        </pc:spChg>
+      </pc:sldChg>
+    </pc:docChg>
+  </pc:docChgLst>
+</pc:chgInfo>
 </file>
 
 <file path=ppt/slideLayouts/slideLayout1.xml><?xml version="1.0" encoding="utf-8"?>
@@ -3554,12 +3634,12 @@
         <p:spPr>
           <a:xfrm>
             <a:off x="127819" y="1825625"/>
-            <a:ext cx="11946194" cy="4351338"/>
+            <a:ext cx="12339484" cy="4351338"/>
           </a:xfrm>
         </p:spPr>
         <p:txBody>
           <a:bodyPr>
-            <a:normAutofit fontScale="92500" lnSpcReduction="20000"/>
+            <a:normAutofit fontScale="85000" lnSpcReduction="20000"/>
           </a:bodyPr>
           <a:lstStyle/>
           <a:p>
@@ -3624,8 +3704,20 @@
             </a:r>
             <a:r>
               <a:rPr lang="en-US" dirty="0"/>
-              <a:t>(screen) :: every class has their own draw function.</a:t>
-            </a:r>
+              <a:t>(screen) :: every class has their own draw function,</a:t>
+            </a:r>
+            <a:br>
+              <a:rPr lang="en-US" dirty="0"/>
+            </a:br>
+            <a:r>
+              <a:rPr lang="en-US" dirty="0"/>
+              <a:t> which all use </a:t>
+            </a:r>
+            <a:r>
+              <a:rPr lang="en-US" dirty="0" err="1"/>
+              <a:t>Pygame.draw.rect</a:t>
+            </a:r>
+            <a:endParaRPr lang="en-US" dirty="0"/>
           </a:p>
           <a:p>
             <a:pPr marL="0" indent="0">
@@ -3737,7 +3829,7 @@
           <a:p>
             <a:r>
               <a:rPr lang="en-US" dirty="0"/>
-              <a:t>What is movement, anyways?</a:t>
+              <a:t>Movement</a:t>
             </a:r>
           </a:p>
         </p:txBody>
@@ -3768,7 +3860,7 @@
             </a:pPr>
             <a:r>
               <a:rPr lang="en-US" dirty="0"/>
-              <a:t>Collision detection was a big hurdle. </a:t>
+              <a:t>A new head is generated one SEGMENT_SIZE away every MOVEMENT_DELAY, then the end of the body disappeared. This was ‘movement’. </a:t>
             </a:r>
           </a:p>
           <a:p>
@@ -3777,47 +3869,14 @@
             </a:pPr>
             <a:r>
               <a:rPr lang="en-US" dirty="0"/>
-              <a:t>Originally the snake ‘moved’ one pixel per second, smoothly.</a:t>
-            </a:r>
-            <a:br>
-              <a:rPr lang="en-US" dirty="0"/>
-            </a:br>
-            <a:r>
-              <a:rPr lang="en-US" dirty="0"/>
-              <a:t>“smooth movement” introduced too many problems.</a:t>
-            </a:r>
-            <a:br>
-              <a:rPr lang="en-US" dirty="0"/>
-            </a:br>
-            <a:r>
-              <a:rPr lang="en-US" dirty="0"/>
-              <a:t>“fast movement,” which was slowed down by time solved these.</a:t>
-            </a:r>
-            <a:br>
-              <a:rPr lang="en-US" dirty="0"/>
-            </a:br>
-            <a:r>
-              <a:rPr lang="en-US" dirty="0"/>
-              <a:t>But “Movement” was a misnomer. So I started calling everything SEGMENT_SIZE.</a:t>
+              <a:t>A snake body is a head rectangle, and a rectangle occupying where the head just was, and another rectangle occupying where the first body segment was, and so on. </a:t>
             </a:r>
           </a:p>
           <a:p>
             <a:pPr marL="0" indent="0">
               <a:buNone/>
             </a:pPr>
-            <a:r>
-              <a:rPr lang="en-US" dirty="0"/>
-              <a:t>You move 1 SEGMENT_SIZE every MOVEMENT_DELAY.</a:t>
-            </a:r>
-          </a:p>
-          <a:p>
-            <a:pPr marL="0" indent="0">
-              <a:buNone/>
-            </a:pPr>
-            <a:r>
-              <a:rPr lang="en-US" dirty="0"/>
-              <a:t>A snake body is a head, and a rectangle one SEGMENT_SIZE away, and another rectangle one SEGMENT_SIZE away. </a:t>
-            </a:r>
+            <a:endParaRPr lang="en-US" dirty="0"/>
           </a:p>
         </p:txBody>
       </p:sp>
@@ -3899,7 +3958,12 @@
             <p:ph idx="1"/>
           </p:nvPr>
         </p:nvSpPr>
-        <p:spPr/>
+        <p:spPr>
+          <a:xfrm>
+            <a:off x="838200" y="1825624"/>
+            <a:ext cx="10515600" cy="5032375"/>
+          </a:xfrm>
+        </p:spPr>
         <p:txBody>
           <a:bodyPr/>
           <a:lstStyle/>
@@ -3909,15 +3973,7 @@
             </a:pPr>
             <a:r>
               <a:rPr lang="en-US" dirty="0"/>
-              <a:t>We were </a:t>
-            </a:r>
-            <a:r>
-              <a:rPr lang="en-US" dirty="0" err="1"/>
-              <a:t>blitting</a:t>
-            </a:r>
-            <a:r>
-              <a:rPr lang="en-US" dirty="0"/>
-              <a:t> everywhere. We </a:t>
+              <a:t>To </a:t>
             </a:r>
             <a:r>
               <a:rPr lang="en-US" dirty="0" err="1"/>
@@ -3925,11 +3981,33 @@
             </a:r>
             <a:r>
               <a:rPr lang="en-US" dirty="0"/>
-              <a:t> a score up top:</a:t>
-            </a:r>
-            <a:br>
+              <a:t> is to place an image or text on screen to be rendered. We </a:t>
+            </a:r>
+            <a:r>
+              <a:rPr lang="en-US" dirty="0" err="1"/>
+              <a:t>blit</a:t>
+            </a:r>
+            <a:r>
               <a:rPr lang="en-US" dirty="0"/>
-            </a:br>
+              <a:t> a score, some text, even a game over image can be </a:t>
+            </a:r>
+            <a:r>
+              <a:rPr lang="en-US" dirty="0" err="1"/>
+              <a:t>blit</a:t>
+            </a:r>
+            <a:r>
+              <a:rPr lang="en-US" dirty="0"/>
+              <a:t> to the user.</a:t>
+            </a:r>
+          </a:p>
+          <a:p>
+            <a:pPr marL="0" indent="0">
+              <a:buNone/>
+            </a:pPr>
+            <a:r>
+              <a:rPr lang="en-US" dirty="0"/>
+              <a:t>     </a:t>
+            </a:r>
             <a:r>
               <a:rPr lang="en-US" dirty="0" err="1"/>
               <a:t>self.screen.blit</a:t>
@@ -3937,119 +4015,6 @@
             <a:r>
               <a:rPr lang="en-US" dirty="0"/>
               <a:t>(text,(10,10))</a:t>
-            </a:r>
-          </a:p>
-          <a:p>
-            <a:pPr marL="0" indent="0">
-              <a:buNone/>
-            </a:pPr>
-            <a:r>
-              <a:rPr lang="en-US" dirty="0"/>
-              <a:t>We </a:t>
-            </a:r>
-            <a:r>
-              <a:rPr lang="en-US" dirty="0" err="1"/>
-              <a:t>blit</a:t>
-            </a:r>
-            <a:r>
-              <a:rPr lang="en-US" dirty="0"/>
-              <a:t> a tombstone</a:t>
-            </a:r>
-            <a:br>
-              <a:rPr lang="en-US" dirty="0"/>
-            </a:br>
-            <a:r>
-              <a:rPr lang="en-US" dirty="0"/>
-              <a:t>        </a:t>
-            </a:r>
-            <a:r>
-              <a:rPr lang="en-US" dirty="0" err="1"/>
-              <a:t>self.screen.blit</a:t>
-            </a:r>
-            <a:r>
-              <a:rPr lang="en-US" dirty="0"/>
-              <a:t>(</a:t>
-            </a:r>
-            <a:r>
-              <a:rPr lang="en-US" dirty="0" err="1"/>
-              <a:t>self.tombstone</a:t>
-            </a:r>
-            <a:r>
-              <a:rPr lang="en-US" dirty="0"/>
-              <a:t>, (233,0))</a:t>
-            </a:r>
-          </a:p>
-          <a:p>
-            <a:pPr marL="0" indent="0">
-              <a:buNone/>
-            </a:pPr>
-            <a:r>
-              <a:rPr lang="en-US" dirty="0"/>
-              <a:t>We Even </a:t>
-            </a:r>
-            <a:r>
-              <a:rPr lang="en-US" dirty="0" err="1"/>
-              <a:t>blit</a:t>
-            </a:r>
-            <a:r>
-              <a:rPr lang="en-US" dirty="0"/>
-              <a:t> on a </a:t>
-            </a:r>
-            <a:r>
-              <a:rPr lang="en-US" dirty="0" err="1"/>
-              <a:t>blit</a:t>
-            </a:r>
-            <a:r>
-              <a:rPr lang="en-US" dirty="0"/>
-              <a:t>, putting text on that tombstone:</a:t>
-            </a:r>
-            <a:br>
-              <a:rPr lang="en-US" dirty="0"/>
-            </a:br>
-            <a:r>
-              <a:rPr lang="en-US" dirty="0"/>
-              <a:t>        </a:t>
-            </a:r>
-            <a:r>
-              <a:rPr lang="en-US" dirty="0" err="1"/>
-              <a:t>self.screen.blit</a:t>
-            </a:r>
-            <a:r>
-              <a:rPr lang="en-US" dirty="0"/>
-              <a:t>(</a:t>
-            </a:r>
-            <a:r>
-              <a:rPr lang="en-US" dirty="0" err="1"/>
-              <a:t>score_text</a:t>
-            </a:r>
-            <a:r>
-              <a:rPr lang="en-US" dirty="0"/>
-              <a:t>, (355, 325))</a:t>
-            </a:r>
-          </a:p>
-          <a:p>
-            <a:pPr marL="0" indent="0">
-              <a:buNone/>
-            </a:pPr>
-            <a:r>
-              <a:rPr lang="en-US" dirty="0"/>
-              <a:t>Between </a:t>
-            </a:r>
-            <a:r>
-              <a:rPr lang="en-US" dirty="0" err="1"/>
-              <a:t>screen.fill</a:t>
-            </a:r>
-            <a:r>
-              <a:rPr lang="en-US" dirty="0"/>
-              <a:t>, and </a:t>
-            </a:r>
-            <a:r>
-              <a:rPr lang="en-US" dirty="0" err="1"/>
-              <a:t>blit</a:t>
-            </a:r>
-            <a:r>
-              <a:rPr lang="en-US" dirty="0"/>
-              <a:t>, most of the rendering work is done! </a:t>
             </a:r>
           </a:p>
           <a:p>

--- a/presentation/The main lesson.pptx
+++ b/presentation/The main lesson.pptx
@@ -9,8 +9,7 @@
     <p:sldId id="257" r:id="rId3"/>
     <p:sldId id="258" r:id="rId4"/>
     <p:sldId id="259" r:id="rId5"/>
-    <p:sldId id="260" r:id="rId6"/>
-    <p:sldId id="261" r:id="rId7"/>
+    <p:sldId id="261" r:id="rId6"/>
   </p:sldIdLst>
   <p:sldSz cx="12192000" cy="6858000"/>
   <p:notesSz cx="6858000" cy="9144000"/>
@@ -120,7 +119,7 @@
 <file path=ppt/revisionInfo.xml><?xml version="1.0" encoding="utf-8"?>
 <p1510:revInfo xmlns:a="http://schemas.openxmlformats.org/drawingml/2006/main" xmlns:r="http://schemas.openxmlformats.org/officeDocument/2006/relationships" xmlns:p1510="http://schemas.microsoft.com/office/powerpoint/2015/10/main">
   <p1510:revLst>
-    <p1510:client id="{D7A49E53-D16F-4F7F-84C0-A9B5FA19F733}" v="3" dt="2026-08-03T01:16:19.342"/>
+    <p1510:client id="{D7A49E53-D16F-4F7F-84C0-A9B5FA19F733}" v="6" dt="2026-08-03T03:14:35.682"/>
   </p1510:revLst>
 </p1510:revInfo>
 </file>
@@ -129,19 +128,42 @@
 <pc:chgInfo xmlns:a="http://schemas.openxmlformats.org/drawingml/2006/main" xmlns:r="http://schemas.openxmlformats.org/officeDocument/2006/relationships" xmlns:ac="http://schemas.microsoft.com/office/drawing/2013/main/command" xmlns:pc="http://schemas.microsoft.com/office/powerpoint/2013/main/command">
   <pc:docChgLst>
     <pc:chgData name="Jemma Little" userId="6e23c02541cfb0bd" providerId="LiveId" clId="{B71C111D-398C-466F-BDD7-B627A9C0CF12}"/>
-    <pc:docChg chg="undo custSel modSld">
-      <pc:chgData name="Jemma Little" userId="6e23c02541cfb0bd" providerId="LiveId" clId="{B71C111D-398C-466F-BDD7-B627A9C0CF12}" dt="2026-08-03T01:16:34.109" v="651" actId="20577"/>
+    <pc:docChg chg="undo custSel delSld modSld">
+      <pc:chgData name="Jemma Little" userId="6e23c02541cfb0bd" providerId="LiveId" clId="{B71C111D-398C-466F-BDD7-B627A9C0CF12}" dt="2026-08-03T03:18:25.720" v="4113" actId="20577"/>
       <pc:docMkLst>
         <pc:docMk/>
       </pc:docMkLst>
       <pc:sldChg chg="modSp mod">
-        <pc:chgData name="Jemma Little" userId="6e23c02541cfb0bd" providerId="LiveId" clId="{B71C111D-398C-466F-BDD7-B627A9C0CF12}" dt="2026-08-03T01:11:35.768" v="68" actId="20577"/>
+        <pc:chgData name="Jemma Little" userId="6e23c02541cfb0bd" providerId="LiveId" clId="{B71C111D-398C-466F-BDD7-B627A9C0CF12}" dt="2026-08-03T02:59:07.444" v="1465" actId="20577"/>
+        <pc:sldMkLst>
+          <pc:docMk/>
+          <pc:sldMk cId="2093612931" sldId="256"/>
+        </pc:sldMkLst>
+        <pc:spChg chg="mod">
+          <ac:chgData name="Jemma Little" userId="6e23c02541cfb0bd" providerId="LiveId" clId="{B71C111D-398C-466F-BDD7-B627A9C0CF12}" dt="2026-08-03T02:59:07.444" v="1465" actId="20577"/>
+          <ac:spMkLst>
+            <pc:docMk/>
+            <pc:sldMk cId="2093612931" sldId="256"/>
+            <ac:spMk id="3" creationId="{B421D6FD-6C33-02A0-DE53-1E186D4E6ACE}"/>
+          </ac:spMkLst>
+        </pc:spChg>
+      </pc:sldChg>
+      <pc:sldChg chg="modSp mod">
+        <pc:chgData name="Jemma Little" userId="6e23c02541cfb0bd" providerId="LiveId" clId="{B71C111D-398C-466F-BDD7-B627A9C0CF12}" dt="2026-08-03T03:03:27.335" v="1917" actId="1076"/>
         <pc:sldMkLst>
           <pc:docMk/>
           <pc:sldMk cId="1731413787" sldId="258"/>
         </pc:sldMkLst>
         <pc:spChg chg="mod">
-          <ac:chgData name="Jemma Little" userId="6e23c02541cfb0bd" providerId="LiveId" clId="{B71C111D-398C-466F-BDD7-B627A9C0CF12}" dt="2026-08-03T01:11:35.768" v="68" actId="20577"/>
+          <ac:chgData name="Jemma Little" userId="6e23c02541cfb0bd" providerId="LiveId" clId="{B71C111D-398C-466F-BDD7-B627A9C0CF12}" dt="2026-08-03T03:02:28.618" v="1911" actId="1076"/>
+          <ac:spMkLst>
+            <pc:docMk/>
+            <pc:sldMk cId="1731413787" sldId="258"/>
+            <ac:spMk id="2" creationId="{195CEB75-F8EB-F261-A4CD-BAC0FF342F79}"/>
+          </ac:spMkLst>
+        </pc:spChg>
+        <pc:spChg chg="mod">
+          <ac:chgData name="Jemma Little" userId="6e23c02541cfb0bd" providerId="LiveId" clId="{B71C111D-398C-466F-BDD7-B627A9C0CF12}" dt="2026-08-03T03:03:27.335" v="1917" actId="1076"/>
           <ac:spMkLst>
             <pc:docMk/>
             <pc:sldMk cId="1731413787" sldId="258"/>
@@ -150,13 +172,13 @@
         </pc:spChg>
       </pc:sldChg>
       <pc:sldChg chg="modSp mod">
-        <pc:chgData name="Jemma Little" userId="6e23c02541cfb0bd" providerId="LiveId" clId="{B71C111D-398C-466F-BDD7-B627A9C0CF12}" dt="2026-08-03T01:14:30.351" v="406" actId="20577"/>
+        <pc:chgData name="Jemma Little" userId="6e23c02541cfb0bd" providerId="LiveId" clId="{B71C111D-398C-466F-BDD7-B627A9C0CF12}" dt="2026-08-03T03:14:06.333" v="3503" actId="20577"/>
         <pc:sldMkLst>
           <pc:docMk/>
           <pc:sldMk cId="3320564778" sldId="259"/>
         </pc:sldMkLst>
         <pc:spChg chg="mod">
-          <ac:chgData name="Jemma Little" userId="6e23c02541cfb0bd" providerId="LiveId" clId="{B71C111D-398C-466F-BDD7-B627A9C0CF12}" dt="2026-08-03T01:11:58.510" v="85" actId="20577"/>
+          <ac:chgData name="Jemma Little" userId="6e23c02541cfb0bd" providerId="LiveId" clId="{B71C111D-398C-466F-BDD7-B627A9C0CF12}" dt="2026-08-03T03:03:55.639" v="1940" actId="20577"/>
           <ac:spMkLst>
             <pc:docMk/>
             <pc:sldMk cId="3320564778" sldId="259"/>
@@ -164,7 +186,7 @@
           </ac:spMkLst>
         </pc:spChg>
         <pc:spChg chg="mod">
-          <ac:chgData name="Jemma Little" userId="6e23c02541cfb0bd" providerId="LiveId" clId="{B71C111D-398C-466F-BDD7-B627A9C0CF12}" dt="2026-08-03T01:14:30.351" v="406" actId="20577"/>
+          <ac:chgData name="Jemma Little" userId="6e23c02541cfb0bd" providerId="LiveId" clId="{B71C111D-398C-466F-BDD7-B627A9C0CF12}" dt="2026-08-03T03:14:06.333" v="3503" actId="20577"/>
           <ac:spMkLst>
             <pc:docMk/>
             <pc:sldMk cId="3320564778" sldId="259"/>
@@ -172,8 +194,8 @@
           </ac:spMkLst>
         </pc:spChg>
       </pc:sldChg>
-      <pc:sldChg chg="modSp mod">
-        <pc:chgData name="Jemma Little" userId="6e23c02541cfb0bd" providerId="LiveId" clId="{B71C111D-398C-466F-BDD7-B627A9C0CF12}" dt="2026-08-03T01:16:34.109" v="651" actId="20577"/>
+      <pc:sldChg chg="modSp del mod">
+        <pc:chgData name="Jemma Little" userId="6e23c02541cfb0bd" providerId="LiveId" clId="{B71C111D-398C-466F-BDD7-B627A9C0CF12}" dt="2026-08-03T02:55:51.742" v="1457" actId="2696"/>
         <pc:sldMkLst>
           <pc:docMk/>
           <pc:sldMk cId="1546502522" sldId="260"/>
@@ -184,6 +206,29 @@
             <pc:docMk/>
             <pc:sldMk cId="1546502522" sldId="260"/>
             <ac:spMk id="3" creationId="{69E4F5C1-B1A8-18F2-DBCE-D6384DD1953E}"/>
+          </ac:spMkLst>
+        </pc:spChg>
+      </pc:sldChg>
+      <pc:sldChg chg="modSp mod">
+        <pc:chgData name="Jemma Little" userId="6e23c02541cfb0bd" providerId="LiveId" clId="{B71C111D-398C-466F-BDD7-B627A9C0CF12}" dt="2026-08-03T03:18:25.720" v="4113" actId="20577"/>
+        <pc:sldMkLst>
+          <pc:docMk/>
+          <pc:sldMk cId="512381374" sldId="261"/>
+        </pc:sldMkLst>
+        <pc:spChg chg="mod">
+          <ac:chgData name="Jemma Little" userId="6e23c02541cfb0bd" providerId="LiveId" clId="{B71C111D-398C-466F-BDD7-B627A9C0CF12}" dt="2026-08-03T03:14:31.750" v="3542" actId="20577"/>
+          <ac:spMkLst>
+            <pc:docMk/>
+            <pc:sldMk cId="512381374" sldId="261"/>
+            <ac:spMk id="2" creationId="{31F006B1-AC3B-F0A2-E1AD-B5EEEF54D106}"/>
+          </ac:spMkLst>
+        </pc:spChg>
+        <pc:spChg chg="mod">
+          <ac:chgData name="Jemma Little" userId="6e23c02541cfb0bd" providerId="LiveId" clId="{B71C111D-398C-466F-BDD7-B627A9C0CF12}" dt="2026-08-03T03:18:25.720" v="4113" actId="20577"/>
+          <ac:spMkLst>
+            <pc:docMk/>
+            <pc:sldMk cId="512381374" sldId="261"/>
+            <ac:spMk id="3" creationId="{9DCDC6E3-BFAF-98D4-03DB-7E019ABF4389}"/>
           </ac:spMkLst>
         </pc:spChg>
       </pc:sldChg>
@@ -3462,7 +3507,7 @@
           <a:p>
             <a:r>
               <a:rPr lang="en-US" dirty="0"/>
-              <a:t>Move quickly and make lots of commits.</a:t>
+              <a:t>Frequent commits allowed experimentation without fear of breaking the project.</a:t>
             </a:r>
           </a:p>
         </p:txBody>
@@ -3603,56 +3648,109 @@
             <p:ph type="title"/>
           </p:nvPr>
         </p:nvSpPr>
-        <p:spPr/>
-        <p:txBody>
-          <a:bodyPr/>
-          <a:lstStyle/>
-          <a:p>
-            <a:r>
-              <a:rPr lang="en-US" dirty="0"/>
-              <a:t>Most important parts</a:t>
-            </a:r>
-          </a:p>
-        </p:txBody>
-      </p:sp>
-      <p:sp>
-        <p:nvSpPr>
-          <p:cNvPr id="3" name="Content Placeholder 2">
-            <a:extLst>
-              <a:ext uri="{FF2B5EF4-FFF2-40B4-BE49-F238E27FC236}">
-                <a16:creationId xmlns:a16="http://schemas.microsoft.com/office/drawing/2014/main" id="{2BBEFCDB-5DAE-4281-F2EA-B4D3691037CF}"/>
-              </a:ext>
-            </a:extLst>
-          </p:cNvPr>
-          <p:cNvSpPr>
-            <a:spLocks noGrp="1"/>
-          </p:cNvSpPr>
-          <p:nvPr>
-            <p:ph idx="1"/>
-          </p:nvPr>
-        </p:nvSpPr>
         <p:spPr>
           <a:xfrm>
-            <a:off x="127819" y="1825625"/>
+            <a:off x="208936" y="286467"/>
+            <a:ext cx="10515600" cy="3253146"/>
+          </a:xfrm>
+        </p:spPr>
+        <p:txBody>
+          <a:bodyPr>
+            <a:normAutofit fontScale="90000"/>
+          </a:bodyPr>
+          <a:lstStyle/>
+          <a:p>
+            <a:r>
+              <a:rPr lang="en-US" dirty="0"/>
+              <a:t>At its basic level, A game is a loop.</a:t>
+            </a:r>
+            <a:br>
+              <a:rPr lang="en-US" dirty="0"/>
+            </a:br>
+            <a:r>
+              <a:rPr lang="en-US" dirty="0"/>
+              <a:t>While running:</a:t>
+            </a:r>
+            <a:br>
+              <a:rPr lang="en-US" dirty="0"/>
+            </a:br>
+            <a:r>
+              <a:rPr lang="en-US" dirty="0"/>
+              <a:t>	events</a:t>
+            </a:r>
+            <a:br>
+              <a:rPr lang="en-US" dirty="0"/>
+            </a:br>
+            <a:r>
+              <a:rPr lang="en-US" dirty="0"/>
+              <a:t>	update</a:t>
+            </a:r>
+            <a:br>
+              <a:rPr lang="en-US" dirty="0"/>
+            </a:br>
+            <a:r>
+              <a:rPr lang="en-US" dirty="0"/>
+              <a:t>	render</a:t>
+            </a:r>
+            <a:br>
+              <a:rPr lang="en-US" dirty="0"/>
+            </a:br>
+            <a:r>
+              <a:rPr lang="en-US" dirty="0"/>
+              <a:t>	display</a:t>
+            </a:r>
+          </a:p>
+        </p:txBody>
+      </p:sp>
+      <p:sp>
+        <p:nvSpPr>
+          <p:cNvPr id="3" name="Content Placeholder 2">
+            <a:extLst>
+              <a:ext uri="{FF2B5EF4-FFF2-40B4-BE49-F238E27FC236}">
+                <a16:creationId xmlns:a16="http://schemas.microsoft.com/office/drawing/2014/main" id="{2BBEFCDB-5DAE-4281-F2EA-B4D3691037CF}"/>
+              </a:ext>
+            </a:extLst>
+          </p:cNvPr>
+          <p:cNvSpPr>
+            <a:spLocks noGrp="1"/>
+          </p:cNvSpPr>
+          <p:nvPr>
+            <p:ph idx="1"/>
+          </p:nvPr>
+        </p:nvSpPr>
+        <p:spPr>
+          <a:xfrm>
+            <a:off x="4203236" y="2506662"/>
             <a:ext cx="12339484" cy="4351338"/>
           </a:xfrm>
         </p:spPr>
         <p:txBody>
           <a:bodyPr>
-            <a:normAutofit fontScale="85000" lnSpcReduction="20000"/>
+            <a:normAutofit lnSpcReduction="10000"/>
           </a:bodyPr>
           <a:lstStyle/>
           <a:p>
             <a:pPr marL="0" indent="0">
               <a:buNone/>
             </a:pPr>
+            <a:r>
+              <a:rPr lang="en-US" dirty="0"/>
+              <a:t>Initialize </a:t>
+            </a:r>
+            <a:br>
+              <a:rPr lang="en-US" dirty="0"/>
+            </a:br>
+            <a:r>
+              <a:rPr lang="en-US" dirty="0"/>
+              <a:t>	</a:t>
+            </a:r>
             <a:r>
               <a:rPr lang="en-US" dirty="0" err="1"/>
               <a:t>pygame.init</a:t>
             </a:r>
             <a:r>
               <a:rPr lang="en-US" dirty="0"/>
-              <a:t>()   : start the game</a:t>
+              <a:t>()</a:t>
             </a:r>
           </a:p>
           <a:p>
@@ -3661,7 +3759,7 @@
             </a:pPr>
             <a:r>
               <a:rPr lang="en-US" dirty="0"/>
-              <a:t>screen = </a:t>
+              <a:t>	Screen = </a:t>
             </a:r>
             <a:r>
               <a:rPr lang="en-US" dirty="0" err="1"/>
@@ -3669,7 +3767,7 @@
             </a:r>
             <a:r>
               <a:rPr lang="en-US" dirty="0"/>
-              <a:t>((SCREEN_WIDTH, SCREEN_HEIGHT))   :: initialize the game base</a:t>
+              <a:t>(800,600)</a:t>
             </a:r>
           </a:p>
           <a:p>
@@ -3678,20 +3776,24 @@
             </a:pPr>
             <a:r>
               <a:rPr lang="en-US" dirty="0"/>
-              <a:t>running = True  :: a Boolean flag for while loops</a:t>
+              <a:t>Render</a:t>
             </a:r>
           </a:p>
           <a:p>
             <a:pPr marL="0" indent="0">
               <a:buNone/>
             </a:pPr>
+            <a:r>
+              <a:rPr lang="en-US" dirty="0"/>
+              <a:t>	</a:t>
+            </a:r>
             <a:r>
               <a:rPr lang="en-US" dirty="0" err="1"/>
               <a:t>screen.fill</a:t>
             </a:r>
             <a:r>
               <a:rPr lang="en-US" dirty="0"/>
-              <a:t>((0,0,0)) :: fills the screen with the color (0,0,0) black.</a:t>
+              <a:t>()</a:t>
             </a:r>
           </a:p>
           <a:p>
@@ -3699,80 +3801,60 @@
               <a:buNone/>
             </a:pPr>
             <a:r>
+              <a:rPr lang="en-US" dirty="0"/>
+              <a:t>	</a:t>
+            </a:r>
+            <a:r>
               <a:rPr lang="en-US" dirty="0" err="1"/>
-              <a:t>snake.draw</a:t>
-            </a:r>
-            <a:r>
-              <a:rPr lang="en-US" dirty="0"/>
-              <a:t>(screen) :: every class has their own draw function,</a:t>
-            </a:r>
-            <a:br>
-              <a:rPr lang="en-US" dirty="0"/>
-            </a:br>
-            <a:r>
-              <a:rPr lang="en-US" dirty="0"/>
-              <a:t> which all use </a:t>
-            </a:r>
-            <a:r>
-              <a:rPr lang="en-US" dirty="0" err="1"/>
-              <a:t>Pygame.draw.rect</a:t>
-            </a:r>
-            <a:endParaRPr lang="en-US" dirty="0"/>
+              <a:t>object.draw</a:t>
+            </a:r>
+            <a:r>
+              <a:rPr lang="en-US" dirty="0"/>
+              <a:t>()</a:t>
+            </a:r>
           </a:p>
           <a:p>
             <a:pPr marL="0" indent="0">
               <a:buNone/>
             </a:pPr>
+            <a:r>
+              <a:rPr lang="en-US" dirty="0"/>
+              <a:t>	</a:t>
+            </a:r>
             <a:r>
               <a:rPr lang="en-US" dirty="0" err="1"/>
               <a:t>pygame.display.flip</a:t>
             </a:r>
             <a:r>
               <a:rPr lang="en-US" dirty="0"/>
-              <a:t>() :: this takes your display data and puts it on the screen</a:t>
+              <a:t>()</a:t>
             </a:r>
           </a:p>
           <a:p>
             <a:pPr marL="0" indent="0">
               <a:buNone/>
             </a:pPr>
+            <a:r>
+              <a:rPr lang="en-US" dirty="0"/>
+              <a:t>Timing</a:t>
+            </a:r>
+          </a:p>
+          <a:p>
+            <a:pPr marL="0" indent="0">
+              <a:buNone/>
+            </a:pPr>
+            <a:r>
+              <a:rPr lang="en-US" dirty="0"/>
+              <a:t>	</a:t>
+            </a:r>
             <a:r>
               <a:rPr lang="en-US" dirty="0" err="1"/>
               <a:t>clock.tick</a:t>
             </a:r>
             <a:r>
               <a:rPr lang="en-US" dirty="0"/>
-              <a:t>(60) :: makes it 60 fps. </a:t>
-            </a:r>
-          </a:p>
-          <a:p>
-            <a:pPr marL="0" indent="0">
-              <a:buNone/>
-            </a:pPr>
-            <a:r>
-              <a:rPr lang="en-US" dirty="0"/>
-              <a:t>While running:</a:t>
-            </a:r>
-            <a:br>
-              <a:rPr lang="en-US" dirty="0"/>
-            </a:br>
-            <a:r>
-              <a:rPr lang="en-US" dirty="0"/>
-              <a:t>	update -&gt; draw -&gt; repeat</a:t>
-            </a:r>
-            <a:br>
-              <a:rPr lang="en-US" dirty="0"/>
-            </a:br>
-            <a:r>
-              <a:rPr lang="en-US" dirty="0"/>
-              <a:t>close</a:t>
-            </a:r>
-          </a:p>
-          <a:p>
-            <a:pPr marL="0" indent="0">
-              <a:buNone/>
-            </a:pPr>
-            <a:endParaRPr lang="en-US" dirty="0"/>
+              <a:t>()</a:t>
+            </a:r>
           </a:p>
         </p:txBody>
       </p:sp>
@@ -3829,7 +3911,7 @@
           <a:p>
             <a:r>
               <a:rPr lang="en-US" dirty="0"/>
-              <a:t>Movement</a:t>
+              <a:t>Feature Development</a:t>
             </a:r>
           </a:p>
         </p:txBody>
@@ -3852,7 +3934,9 @@
         </p:nvSpPr>
         <p:spPr/>
         <p:txBody>
-          <a:bodyPr/>
+          <a:bodyPr>
+            <a:normAutofit fontScale="62500" lnSpcReduction="20000"/>
+          </a:bodyPr>
           <a:lstStyle/>
           <a:p>
             <a:pPr marL="0" indent="0">
@@ -3860,7 +3944,7 @@
             </a:pPr>
             <a:r>
               <a:rPr lang="en-US" dirty="0"/>
-              <a:t>A new head is generated one SEGMENT_SIZE away every MOVEMENT_DELAY, then the end of the body disappeared. This was ‘movement’. </a:t>
+              <a:t>Code -&gt; </a:t>
             </a:r>
           </a:p>
           <a:p>
@@ -3869,8 +3953,110 @@
             </a:pPr>
             <a:r>
               <a:rPr lang="en-US" dirty="0"/>
-              <a:t>A snake body is a head rectangle, and a rectangle occupying where the head just was, and another rectangle occupying where the first body segment was, and so on. </a:t>
-            </a:r>
+              <a:t>Empty Window -&gt;</a:t>
+            </a:r>
+          </a:p>
+          <a:p>
+            <a:pPr marL="0" indent="0">
+              <a:buNone/>
+            </a:pPr>
+            <a:r>
+              <a:rPr lang="en-US" dirty="0"/>
+              <a:t>Single Pixel -&gt;</a:t>
+            </a:r>
+          </a:p>
+          <a:p>
+            <a:pPr marL="0" indent="0">
+              <a:buNone/>
+            </a:pPr>
+            <a:r>
+              <a:rPr lang="en-US" dirty="0"/>
+              <a:t>Moving Pixel -&gt; </a:t>
+            </a:r>
+          </a:p>
+          <a:p>
+            <a:pPr marL="0" indent="0">
+              <a:buNone/>
+            </a:pPr>
+            <a:r>
+              <a:rPr lang="en-US" dirty="0"/>
+              <a:t>Grid movement -&gt;</a:t>
+            </a:r>
+          </a:p>
+          <a:p>
+            <a:pPr marL="0" indent="0">
+              <a:buNone/>
+            </a:pPr>
+            <a:r>
+              <a:rPr lang="en-US" dirty="0"/>
+              <a:t>Walls -&gt;</a:t>
+            </a:r>
+          </a:p>
+          <a:p>
+            <a:pPr marL="0" indent="0">
+              <a:buNone/>
+            </a:pPr>
+            <a:r>
+              <a:rPr lang="en-US" dirty="0"/>
+              <a:t>Fruit -&gt; </a:t>
+            </a:r>
+          </a:p>
+          <a:p>
+            <a:pPr marL="0" indent="0">
+              <a:buNone/>
+            </a:pPr>
+            <a:r>
+              <a:rPr lang="en-US" dirty="0"/>
+              <a:t>Collision -&gt;</a:t>
+            </a:r>
+          </a:p>
+          <a:p>
+            <a:pPr marL="0" indent="0">
+              <a:buNone/>
+            </a:pPr>
+            <a:r>
+              <a:rPr lang="en-US" dirty="0"/>
+              <a:t>High Score -&gt; </a:t>
+            </a:r>
+          </a:p>
+          <a:p>
+            <a:pPr marL="0" indent="0">
+              <a:buNone/>
+            </a:pPr>
+            <a:r>
+              <a:rPr lang="en-US" dirty="0"/>
+              <a:t>Game Over -&gt;</a:t>
+            </a:r>
+          </a:p>
+          <a:p>
+            <a:pPr marL="0" indent="0">
+              <a:buNone/>
+            </a:pPr>
+            <a:r>
+              <a:rPr lang="en-US" dirty="0"/>
+              <a:t>Music</a:t>
+            </a:r>
+          </a:p>
+          <a:p>
+            <a:pPr marL="0" indent="0">
+              <a:buNone/>
+            </a:pPr>
+            <a:endParaRPr lang="en-US" dirty="0"/>
+          </a:p>
+          <a:p>
+            <a:pPr marL="0" indent="0">
+              <a:buNone/>
+            </a:pPr>
+            <a:r>
+              <a:rPr lang="en-US" dirty="0"/>
+              <a:t>Each feature builds on top of the features before it.</a:t>
+            </a:r>
+          </a:p>
+          <a:p>
+            <a:pPr marL="0" indent="0">
+              <a:buNone/>
+            </a:pPr>
+            <a:endParaRPr lang="en-US" dirty="0"/>
           </a:p>
           <a:p>
             <a:pPr marL="0" indent="0">
@@ -3915,7 +4101,7 @@
           <p:cNvPr id="2" name="Title 1">
             <a:extLst>
               <a:ext uri="{FF2B5EF4-FFF2-40B4-BE49-F238E27FC236}">
-                <a16:creationId xmlns:a16="http://schemas.microsoft.com/office/drawing/2014/main" id="{AE7949CF-58DB-DF81-D80C-A7CA3744768F}"/>
+                <a16:creationId xmlns:a16="http://schemas.microsoft.com/office/drawing/2014/main" id="{31F006B1-AC3B-F0A2-E1AD-B5EEEF54D106}"/>
               </a:ext>
             </a:extLst>
           </p:cNvPr>
@@ -3932,12 +4118,8 @@
           <a:lstStyle/>
           <a:p>
             <a:r>
-              <a:rPr lang="en-US" dirty="0" err="1"/>
-              <a:t>Blitting</a:t>
-            </a:r>
-            <a:r>
-              <a:rPr lang="en-US" dirty="0"/>
-              <a:t>!	</a:t>
+              <a:rPr lang="en-US" dirty="0"/>
+              <a:t>Organizing Complexity using OOP</a:t>
             </a:r>
           </a:p>
         </p:txBody>
@@ -3947,7 +4129,7 @@
           <p:cNvPr id="3" name="Content Placeholder 2">
             <a:extLst>
               <a:ext uri="{FF2B5EF4-FFF2-40B4-BE49-F238E27FC236}">
-                <a16:creationId xmlns:a16="http://schemas.microsoft.com/office/drawing/2014/main" id="{69E4F5C1-B1A8-18F2-DBCE-D6384DD1953E}"/>
+                <a16:creationId xmlns:a16="http://schemas.microsoft.com/office/drawing/2014/main" id="{9DCDC6E3-BFAF-98D4-03DB-7E019ABF4389}"/>
               </a:ext>
             </a:extLst>
           </p:cNvPr>
@@ -3960,12 +4142,14 @@
         </p:nvSpPr>
         <p:spPr>
           <a:xfrm>
-            <a:off x="838200" y="1825624"/>
-            <a:ext cx="10515600" cy="5032375"/>
+            <a:off x="0" y="1825625"/>
+            <a:ext cx="12192000" cy="4351338"/>
           </a:xfrm>
         </p:spPr>
         <p:txBody>
-          <a:bodyPr/>
+          <a:bodyPr>
+            <a:normAutofit fontScale="70000" lnSpcReduction="20000"/>
+          </a:bodyPr>
           <a:lstStyle/>
           <a:p>
             <a:pPr marL="0" indent="0">
@@ -3973,48 +4157,76 @@
             </a:pPr>
             <a:r>
               <a:rPr lang="en-US" dirty="0"/>
-              <a:t>To </a:t>
+              <a:t>				</a:t>
             </a:r>
             <a:r>
               <a:rPr lang="en-US" dirty="0" err="1"/>
-              <a:t>blit</a:t>
-            </a:r>
-            <a:r>
-              <a:rPr lang="en-US" dirty="0"/>
-              <a:t> is to place an image or text on screen to be rendered. We </a:t>
-            </a:r>
+              <a:t>GameObject</a:t>
+            </a:r>
+            <a:r>
+              <a:rPr lang="en-US" dirty="0"/>
+              <a:t> </a:t>
+            </a:r>
+          </a:p>
+          <a:p>
+            <a:pPr marL="0" indent="0">
+              <a:buNone/>
+            </a:pPr>
+            <a:r>
+              <a:rPr lang="en-US" dirty="0"/>
+              <a:t>					|</a:t>
+            </a:r>
+          </a:p>
+          <a:p>
+            <a:pPr marL="0" indent="0">
+              <a:buNone/>
+            </a:pPr>
+            <a:r>
+              <a:rPr lang="en-US" dirty="0"/>
+              <a:t>--------------------------------------------------------------------------------------------</a:t>
+            </a:r>
+          </a:p>
+          <a:p>
+            <a:pPr marL="0" indent="0">
+              <a:buNone/>
+            </a:pPr>
+            <a:r>
+              <a:rPr lang="en-US" dirty="0"/>
+              <a:t>|					|	   	                	                    |</a:t>
+            </a:r>
+          </a:p>
+          <a:p>
+            <a:pPr marL="0" indent="0">
+              <a:buNone/>
+            </a:pPr>
+            <a:r>
+              <a:rPr lang="en-US" dirty="0"/>
+              <a:t>Fruit					Wall					Snake Segment</a:t>
+            </a:r>
+            <a:br>
+              <a:rPr lang="en-US" dirty="0"/>
+            </a:br>
+            <a:r>
+              <a:rPr lang="en-US" dirty="0"/>
+              <a:t>										|</a:t>
+            </a:r>
+            <a:br>
+              <a:rPr lang="en-US" dirty="0"/>
+            </a:br>
             <a:r>
               <a:rPr lang="en-US" dirty="0" err="1"/>
-              <a:t>blit</a:t>
-            </a:r>
-            <a:r>
-              <a:rPr lang="en-US" dirty="0"/>
-              <a:t> a score, some text, even a game over image can be </a:t>
-            </a:r>
-            <a:r>
-              <a:rPr lang="en-US" dirty="0" err="1"/>
-              <a:t>blit</a:t>
-            </a:r>
-            <a:r>
-              <a:rPr lang="en-US" dirty="0"/>
-              <a:t> to the user.</a:t>
-            </a:r>
-          </a:p>
-          <a:p>
-            <a:pPr marL="0" indent="0">
-              <a:buNone/>
-            </a:pPr>
-            <a:r>
-              <a:rPr lang="en-US" dirty="0"/>
-              <a:t>     </a:t>
-            </a:r>
-            <a:r>
-              <a:rPr lang="en-US" dirty="0" err="1"/>
-              <a:t>self.screen.blit</a:t>
-            </a:r>
-            <a:r>
-              <a:rPr lang="en-US" dirty="0"/>
-              <a:t>(text,(10,10))</a:t>
+              <a:t>GameObject</a:t>
+            </a:r>
+            <a:r>
+              <a:rPr lang="en-US" dirty="0"/>
+              <a:t> :								Snake</a:t>
+            </a:r>
+            <a:br>
+              <a:rPr lang="en-US" dirty="0"/>
+            </a:br>
+            <a:r>
+              <a:rPr lang="en-US" dirty="0"/>
+              <a:t>Position, size, color, draw()</a:t>
             </a:r>
           </a:p>
           <a:p>
@@ -4023,93 +4235,22 @@
             </a:pPr>
             <a:endParaRPr lang="en-US" dirty="0"/>
           </a:p>
-        </p:txBody>
-      </p:sp>
-    </p:spTree>
-    <p:extLst>
-      <p:ext uri="{BB962C8B-B14F-4D97-AF65-F5344CB8AC3E}">
-        <p14:creationId xmlns:p14="http://schemas.microsoft.com/office/powerpoint/2010/main" val="1546502522"/>
-      </p:ext>
-    </p:extLst>
-  </p:cSld>
-  <p:clrMapOvr>
-    <a:masterClrMapping/>
-  </p:clrMapOvr>
-</p:sld>
-</file>
-
-<file path=ppt/slides/slide6.xml><?xml version="1.0" encoding="utf-8"?>
-<p:sld xmlns:a="http://schemas.openxmlformats.org/drawingml/2006/main" xmlns:r="http://schemas.openxmlformats.org/officeDocument/2006/relationships" xmlns:p="http://schemas.openxmlformats.org/presentationml/2006/main">
-  <p:cSld>
-    <p:spTree>
-      <p:nvGrpSpPr>
-        <p:cNvPr id="1" name=""/>
-        <p:cNvGrpSpPr/>
-        <p:nvPr/>
-      </p:nvGrpSpPr>
-      <p:grpSpPr>
-        <a:xfrm>
-          <a:off x="0" y="0"/>
-          <a:ext cx="0" cy="0"/>
-          <a:chOff x="0" y="0"/>
-          <a:chExt cx="0" cy="0"/>
-        </a:xfrm>
-      </p:grpSpPr>
-      <p:sp>
-        <p:nvSpPr>
-          <p:cNvPr id="2" name="Title 1">
-            <a:extLst>
-              <a:ext uri="{FF2B5EF4-FFF2-40B4-BE49-F238E27FC236}">
-                <a16:creationId xmlns:a16="http://schemas.microsoft.com/office/drawing/2014/main" id="{31F006B1-AC3B-F0A2-E1AD-B5EEEF54D106}"/>
-              </a:ext>
-            </a:extLst>
-          </p:cNvPr>
-          <p:cNvSpPr>
-            <a:spLocks noGrp="1"/>
-          </p:cNvSpPr>
-          <p:nvPr>
-            <p:ph type="title"/>
-          </p:nvPr>
-        </p:nvSpPr>
-        <p:spPr/>
-        <p:txBody>
-          <a:bodyPr/>
-          <a:lstStyle/>
-          <a:p>
-            <a:r>
-              <a:rPr lang="en-US" dirty="0"/>
-              <a:t>Organizing it</a:t>
-            </a:r>
-          </a:p>
-        </p:txBody>
-      </p:sp>
-      <p:sp>
-        <p:nvSpPr>
-          <p:cNvPr id="3" name="Content Placeholder 2">
-            <a:extLst>
-              <a:ext uri="{FF2B5EF4-FFF2-40B4-BE49-F238E27FC236}">
-                <a16:creationId xmlns:a16="http://schemas.microsoft.com/office/drawing/2014/main" id="{9DCDC6E3-BFAF-98D4-03DB-7E019ABF4389}"/>
-              </a:ext>
-            </a:extLst>
-          </p:cNvPr>
-          <p:cNvSpPr>
-            <a:spLocks noGrp="1"/>
-          </p:cNvSpPr>
-          <p:nvPr>
-            <p:ph idx="1"/>
-          </p:nvPr>
-        </p:nvSpPr>
-        <p:spPr/>
-        <p:txBody>
-          <a:bodyPr/>
-          <a:lstStyle/>
           <a:p>
             <a:pPr marL="0" indent="0">
               <a:buNone/>
             </a:pPr>
             <a:r>
               <a:rPr lang="en-US" dirty="0"/>
-              <a:t>Took everything messy out of main.py and put it in game.py.</a:t>
+              <a:t>Snake:</a:t>
+            </a:r>
+          </a:p>
+          <a:p>
+            <a:pPr marL="0" indent="0">
+              <a:buNone/>
+            </a:pPr>
+            <a:r>
+              <a:rPr lang="en-US" dirty="0"/>
+              <a:t>Movement, Collision, Body Management</a:t>
             </a:r>
             <a:br>
               <a:rPr lang="en-US" dirty="0"/>
@@ -4119,71 +4260,54 @@
             </a:br>
             <a:r>
               <a:rPr lang="en-US" dirty="0"/>
-              <a:t>Tried to give every object their own draw function so main’s draw could just go </a:t>
+              <a:t>Fruit, wall, and </a:t>
             </a:r>
             <a:r>
               <a:rPr lang="en-US" dirty="0" err="1"/>
-              <a:t>snake.draw</a:t>
-            </a:r>
-            <a:r>
-              <a:rPr lang="en-US" dirty="0"/>
-              <a:t>, </a:t>
+              <a:t>SnakeSegment</a:t>
+            </a:r>
+            <a:r>
+              <a:rPr lang="en-US" dirty="0"/>
+              <a:t> all inherit from </a:t>
             </a:r>
             <a:r>
               <a:rPr lang="en-US" dirty="0" err="1"/>
-              <a:t>fruit.draw</a:t>
-            </a:r>
-            <a:r>
-              <a:rPr lang="en-US" dirty="0"/>
-              <a:t>, </a:t>
+              <a:t>GameObject</a:t>
+            </a:r>
+            <a:endParaRPr lang="en-US" dirty="0"/>
+          </a:p>
+          <a:p>
+            <a:pPr marL="0" indent="0">
+              <a:buNone/>
+            </a:pPr>
+            <a:r>
+              <a:rPr lang="en-US" dirty="0"/>
+              <a:t>Snake uses composition to manage </a:t>
+            </a:r>
+            <a:r>
+              <a:rPr lang="en-US"/>
+              <a:t>a collection of </a:t>
             </a:r>
             <a:r>
               <a:rPr lang="en-US" dirty="0" err="1"/>
-              <a:t>score.show</a:t>
+              <a:t>SnakeSegments</a:t>
             </a:r>
             <a:r>
               <a:rPr lang="en-US" dirty="0"/>
               <a:t>.</a:t>
             </a:r>
-            <a:br>
-              <a:rPr lang="en-US" dirty="0"/>
-            </a:br>
-            <a:br>
-              <a:rPr lang="en-US" dirty="0"/>
-            </a:br>
-            <a:r>
-              <a:rPr lang="en-US" dirty="0" err="1"/>
-              <a:t>Src</a:t>
-            </a:r>
-            <a:r>
-              <a:rPr lang="en-US" dirty="0"/>
-              <a:t> held the </a:t>
-            </a:r>
-            <a:r>
-              <a:rPr lang="en-US" dirty="0" err="1"/>
-              <a:t>py</a:t>
-            </a:r>
-            <a:r>
-              <a:rPr lang="en-US" dirty="0"/>
-              <a:t> files, assets held the assets. A readme helped to organize it.  </a:t>
-            </a:r>
           </a:p>
           <a:p>
             <a:pPr marL="0" indent="0">
               <a:buNone/>
             </a:pPr>
-            <a:r>
-              <a:rPr lang="en-US" dirty="0"/>
-              <a:t>Gameplay is ideally one master loop that is very smooth. It’s very easy to have while running: while </a:t>
-            </a:r>
-            <a:r>
-              <a:rPr lang="en-US" dirty="0" err="1"/>
-              <a:t>game_over</a:t>
-            </a:r>
-            <a:r>
-              <a:rPr lang="en-US" dirty="0"/>
-              <a:t>: and accidentally have nested while loops. </a:t>
-            </a:r>
+            <a:endParaRPr lang="en-US" dirty="0"/>
+          </a:p>
+          <a:p>
+            <a:pPr marL="0" indent="0">
+              <a:buNone/>
+            </a:pPr>
+            <a:endParaRPr lang="en-US" dirty="0"/>
           </a:p>
         </p:txBody>
       </p:sp>

--- a/presentation/The main lesson.pptx
+++ b/presentation/The main lesson.pptx
@@ -129,7 +129,7 @@
   <pc:docChgLst>
     <pc:chgData name="Jemma Little" userId="6e23c02541cfb0bd" providerId="LiveId" clId="{B71C111D-398C-466F-BDD7-B627A9C0CF12}"/>
     <pc:docChg chg="undo custSel delSld modSld">
-      <pc:chgData name="Jemma Little" userId="6e23c02541cfb0bd" providerId="LiveId" clId="{B71C111D-398C-466F-BDD7-B627A9C0CF12}" dt="2026-08-03T03:18:25.720" v="4113" actId="20577"/>
+      <pc:chgData name="Jemma Little" userId="6e23c02541cfb0bd" providerId="LiveId" clId="{B71C111D-398C-466F-BDD7-B627A9C0CF12}" dt="2026-08-03T03:47:20.469" v="4172" actId="20577"/>
       <pc:docMkLst>
         <pc:docMk/>
       </pc:docMkLst>
@@ -210,7 +210,7 @@
         </pc:spChg>
       </pc:sldChg>
       <pc:sldChg chg="modSp mod">
-        <pc:chgData name="Jemma Little" userId="6e23c02541cfb0bd" providerId="LiveId" clId="{B71C111D-398C-466F-BDD7-B627A9C0CF12}" dt="2026-08-03T03:18:25.720" v="4113" actId="20577"/>
+        <pc:chgData name="Jemma Little" userId="6e23c02541cfb0bd" providerId="LiveId" clId="{B71C111D-398C-466F-BDD7-B627A9C0CF12}" dt="2026-08-03T03:47:20.469" v="4172" actId="20577"/>
         <pc:sldMkLst>
           <pc:docMk/>
           <pc:sldMk cId="512381374" sldId="261"/>
@@ -224,7 +224,7 @@
           </ac:spMkLst>
         </pc:spChg>
         <pc:spChg chg="mod">
-          <ac:chgData name="Jemma Little" userId="6e23c02541cfb0bd" providerId="LiveId" clId="{B71C111D-398C-466F-BDD7-B627A9C0CF12}" dt="2026-08-03T03:18:25.720" v="4113" actId="20577"/>
+          <ac:chgData name="Jemma Little" userId="6e23c02541cfb0bd" providerId="LiveId" clId="{B71C111D-398C-466F-BDD7-B627A9C0CF12}" dt="2026-08-03T03:47:20.469" v="4172" actId="20577"/>
           <ac:spMkLst>
             <pc:docMk/>
             <pc:sldMk cId="512381374" sldId="261"/>
@@ -4148,7 +4148,7 @@
         </p:spPr>
         <p:txBody>
           <a:bodyPr>
-            <a:normAutofit fontScale="70000" lnSpcReduction="20000"/>
+            <a:normAutofit fontScale="55000" lnSpcReduction="20000"/>
           </a:bodyPr>
           <a:lstStyle/>
           <a:p>
@@ -4182,9 +4182,10 @@
               <a:buNone/>
             </a:pPr>
             <a:r>
-              <a:rPr lang="en-US" dirty="0"/>
-              <a:t>--------------------------------------------------------------------------------------------</a:t>
-            </a:r>
+              <a:rPr lang="en-US"/>
+              <a:t>--------------------------------------------------------------------------------------------------------------------------</a:t>
+            </a:r>
+            <a:endParaRPr lang="en-US" dirty="0"/>
           </a:p>
           <a:p>
             <a:pPr marL="0" indent="0">
@@ -4201,7 +4202,7 @@
             </a:pPr>
             <a:r>
               <a:rPr lang="en-US" dirty="0"/>
-              <a:t>Fruit					Wall					Snake Segment</a:t>
+              <a:t>Fruit					Wall				Snake Segment</a:t>
             </a:r>
             <a:br>
               <a:rPr lang="en-US" dirty="0"/>
@@ -4213,13 +4214,28 @@
             <a:br>
               <a:rPr lang="en-US" dirty="0"/>
             </a:br>
+            <a:r>
+              <a:rPr lang="en-US" dirty="0"/>
+              <a:t>										Snake</a:t>
+            </a:r>
+          </a:p>
+          <a:p>
+            <a:pPr marL="0" indent="0">
+              <a:buNone/>
+            </a:pPr>
+            <a:endParaRPr lang="en-US" dirty="0"/>
+          </a:p>
+          <a:p>
+            <a:pPr marL="0" indent="0">
+              <a:buNone/>
+            </a:pPr>
             <a:r>
               <a:rPr lang="en-US" dirty="0" err="1"/>
               <a:t>GameObject</a:t>
             </a:r>
             <a:r>
               <a:rPr lang="en-US" dirty="0"/>
-              <a:t> :								Snake</a:t>
+              <a:t> :								</a:t>
             </a:r>
             <a:br>
               <a:rPr lang="en-US" dirty="0"/>
@@ -4282,11 +4298,7 @@
             </a:pPr>
             <a:r>
               <a:rPr lang="en-US" dirty="0"/>
-              <a:t>Snake uses composition to manage </a:t>
-            </a:r>
-            <a:r>
-              <a:rPr lang="en-US"/>
-              <a:t>a collection of </a:t>
+              <a:t>Snake uses composition to manage a collection of </a:t>
             </a:r>
             <a:r>
               <a:rPr lang="en-US" dirty="0" err="1"/>

--- a/presentation/The main lesson.pptx
+++ b/presentation/The main lesson.pptx
@@ -129,7 +129,7 @@
   <pc:docChgLst>
     <pc:chgData name="Jemma Little" userId="6e23c02541cfb0bd" providerId="LiveId" clId="{B71C111D-398C-466F-BDD7-B627A9C0CF12}"/>
     <pc:docChg chg="undo custSel delSld modSld">
-      <pc:chgData name="Jemma Little" userId="6e23c02541cfb0bd" providerId="LiveId" clId="{B71C111D-398C-466F-BDD7-B627A9C0CF12}" dt="2026-08-03T03:47:20.469" v="4172" actId="20577"/>
+      <pc:chgData name="Jemma Little" userId="6e23c02541cfb0bd" providerId="LiveId" clId="{B71C111D-398C-466F-BDD7-B627A9C0CF12}" dt="2026-08-03T21:22:01.506" v="4189" actId="1036"/>
       <pc:docMkLst>
         <pc:docMk/>
       </pc:docMkLst>
@@ -148,8 +148,8 @@
           </ac:spMkLst>
         </pc:spChg>
       </pc:sldChg>
-      <pc:sldChg chg="modSp mod">
-        <pc:chgData name="Jemma Little" userId="6e23c02541cfb0bd" providerId="LiveId" clId="{B71C111D-398C-466F-BDD7-B627A9C0CF12}" dt="2026-08-03T03:03:27.335" v="1917" actId="1076"/>
+      <pc:sldChg chg="addSp modSp mod">
+        <pc:chgData name="Jemma Little" userId="6e23c02541cfb0bd" providerId="LiveId" clId="{B71C111D-398C-466F-BDD7-B627A9C0CF12}" dt="2026-08-03T21:19:32.310" v="4174" actId="1076"/>
         <pc:sldMkLst>
           <pc:docMk/>
           <pc:sldMk cId="1731413787" sldId="258"/>
@@ -170,9 +170,17 @@
             <ac:spMk id="3" creationId="{2BBEFCDB-5DAE-4281-F2EA-B4D3691037CF}"/>
           </ac:spMkLst>
         </pc:spChg>
+        <pc:picChg chg="add mod">
+          <ac:chgData name="Jemma Little" userId="6e23c02541cfb0bd" providerId="LiveId" clId="{B71C111D-398C-466F-BDD7-B627A9C0CF12}" dt="2026-08-03T21:19:32.310" v="4174" actId="1076"/>
+          <ac:picMkLst>
+            <pc:docMk/>
+            <pc:sldMk cId="1731413787" sldId="258"/>
+            <ac:picMk id="5" creationId="{556C57C0-11D9-DC98-B330-EFC97F5CD9C2}"/>
+          </ac:picMkLst>
+        </pc:picChg>
       </pc:sldChg>
-      <pc:sldChg chg="modSp mod">
-        <pc:chgData name="Jemma Little" userId="6e23c02541cfb0bd" providerId="LiveId" clId="{B71C111D-398C-466F-BDD7-B627A9C0CF12}" dt="2026-08-03T03:14:06.333" v="3503" actId="20577"/>
+      <pc:sldChg chg="addSp delSp modSp mod">
+        <pc:chgData name="Jemma Little" userId="6e23c02541cfb0bd" providerId="LiveId" clId="{B71C111D-398C-466F-BDD7-B627A9C0CF12}" dt="2026-08-03T21:22:01.506" v="4189" actId="1036"/>
         <pc:sldMkLst>
           <pc:docMk/>
           <pc:sldMk cId="3320564778" sldId="259"/>
@@ -193,6 +201,46 @@
             <ac:spMk id="3" creationId="{89684CE0-91F2-3C78-0D0C-DF7EC975BC36}"/>
           </ac:spMkLst>
         </pc:spChg>
+        <pc:picChg chg="add del mod">
+          <ac:chgData name="Jemma Little" userId="6e23c02541cfb0bd" providerId="LiveId" clId="{B71C111D-398C-466F-BDD7-B627A9C0CF12}" dt="2026-08-03T21:20:44.176" v="4178" actId="478"/>
+          <ac:picMkLst>
+            <pc:docMk/>
+            <pc:sldMk cId="3320564778" sldId="259"/>
+            <ac:picMk id="5" creationId="{9595417C-F4E3-2922-9BA5-1A28211E08E5}"/>
+          </ac:picMkLst>
+        </pc:picChg>
+        <pc:picChg chg="add mod">
+          <ac:chgData name="Jemma Little" userId="6e23c02541cfb0bd" providerId="LiveId" clId="{B71C111D-398C-466F-BDD7-B627A9C0CF12}" dt="2026-08-03T21:21:20.985" v="4180" actId="1076"/>
+          <ac:picMkLst>
+            <pc:docMk/>
+            <pc:sldMk cId="3320564778" sldId="259"/>
+            <ac:picMk id="7" creationId="{C0B1EBFB-3402-DF1C-19CE-6728BC79A800}"/>
+          </ac:picMkLst>
+        </pc:picChg>
+        <pc:picChg chg="add mod">
+          <ac:chgData name="Jemma Little" userId="6e23c02541cfb0bd" providerId="LiveId" clId="{B71C111D-398C-466F-BDD7-B627A9C0CF12}" dt="2026-08-03T21:21:33.115" v="4182" actId="1076"/>
+          <ac:picMkLst>
+            <pc:docMk/>
+            <pc:sldMk cId="3320564778" sldId="259"/>
+            <ac:picMk id="9" creationId="{937C358A-190B-0D99-B173-8310536DBC55}"/>
+          </ac:picMkLst>
+        </pc:picChg>
+        <pc:picChg chg="add del mod">
+          <ac:chgData name="Jemma Little" userId="6e23c02541cfb0bd" providerId="LiveId" clId="{B71C111D-398C-466F-BDD7-B627A9C0CF12}" dt="2026-08-03T21:21:49.264" v="4185" actId="478"/>
+          <ac:picMkLst>
+            <pc:docMk/>
+            <pc:sldMk cId="3320564778" sldId="259"/>
+            <ac:picMk id="11" creationId="{87FE879C-B037-EBD3-DFA2-932C783F5B1B}"/>
+          </ac:picMkLst>
+        </pc:picChg>
+        <pc:picChg chg="add mod">
+          <ac:chgData name="Jemma Little" userId="6e23c02541cfb0bd" providerId="LiveId" clId="{B71C111D-398C-466F-BDD7-B627A9C0CF12}" dt="2026-08-03T21:22:01.506" v="4189" actId="1036"/>
+          <ac:picMkLst>
+            <pc:docMk/>
+            <pc:sldMk cId="3320564778" sldId="259"/>
+            <ac:picMk id="13" creationId="{8092A3B9-4F82-28CF-76C8-55354A1C77EF}"/>
+          </ac:picMkLst>
+        </pc:picChg>
       </pc:sldChg>
       <pc:sldChg chg="modSp del mod">
         <pc:chgData name="Jemma Little" userId="6e23c02541cfb0bd" providerId="LiveId" clId="{B71C111D-398C-466F-BDD7-B627A9C0CF12}" dt="2026-08-03T02:55:51.742" v="1457" actId="2696"/>
@@ -384,7 +432,7 @@
           <a:p>
             <a:fld id="{BC2F845C-7F05-4F68-9CFE-E37358E7B32A}" type="datetimeFigureOut">
               <a:rPr lang="en-US" smtClean="0"/>
-              <a:t>8/2/2026</a:t>
+              <a:t>8/3/2026</a:t>
             </a:fld>
             <a:endParaRPr lang="en-US"/>
           </a:p>
@@ -582,7 +630,7 @@
           <a:p>
             <a:fld id="{BC2F845C-7F05-4F68-9CFE-E37358E7B32A}" type="datetimeFigureOut">
               <a:rPr lang="en-US" smtClean="0"/>
-              <a:t>8/2/2026</a:t>
+              <a:t>8/3/2026</a:t>
             </a:fld>
             <a:endParaRPr lang="en-US"/>
           </a:p>
@@ -790,7 +838,7 @@
           <a:p>
             <a:fld id="{BC2F845C-7F05-4F68-9CFE-E37358E7B32A}" type="datetimeFigureOut">
               <a:rPr lang="en-US" smtClean="0"/>
-              <a:t>8/2/2026</a:t>
+              <a:t>8/3/2026</a:t>
             </a:fld>
             <a:endParaRPr lang="en-US"/>
           </a:p>
@@ -988,7 +1036,7 @@
           <a:p>
             <a:fld id="{BC2F845C-7F05-4F68-9CFE-E37358E7B32A}" type="datetimeFigureOut">
               <a:rPr lang="en-US" smtClean="0"/>
-              <a:t>8/2/2026</a:t>
+              <a:t>8/3/2026</a:t>
             </a:fld>
             <a:endParaRPr lang="en-US"/>
           </a:p>
@@ -1263,7 +1311,7 @@
           <a:p>
             <a:fld id="{BC2F845C-7F05-4F68-9CFE-E37358E7B32A}" type="datetimeFigureOut">
               <a:rPr lang="en-US" smtClean="0"/>
-              <a:t>8/2/2026</a:t>
+              <a:t>8/3/2026</a:t>
             </a:fld>
             <a:endParaRPr lang="en-US"/>
           </a:p>
@@ -1528,7 +1576,7 @@
           <a:p>
             <a:fld id="{BC2F845C-7F05-4F68-9CFE-E37358E7B32A}" type="datetimeFigureOut">
               <a:rPr lang="en-US" smtClean="0"/>
-              <a:t>8/2/2026</a:t>
+              <a:t>8/3/2026</a:t>
             </a:fld>
             <a:endParaRPr lang="en-US"/>
           </a:p>
@@ -1940,7 +1988,7 @@
           <a:p>
             <a:fld id="{BC2F845C-7F05-4F68-9CFE-E37358E7B32A}" type="datetimeFigureOut">
               <a:rPr lang="en-US" smtClean="0"/>
-              <a:t>8/2/2026</a:t>
+              <a:t>8/3/2026</a:t>
             </a:fld>
             <a:endParaRPr lang="en-US"/>
           </a:p>
@@ -2081,7 +2129,7 @@
           <a:p>
             <a:fld id="{BC2F845C-7F05-4F68-9CFE-E37358E7B32A}" type="datetimeFigureOut">
               <a:rPr lang="en-US" smtClean="0"/>
-              <a:t>8/2/2026</a:t>
+              <a:t>8/3/2026</a:t>
             </a:fld>
             <a:endParaRPr lang="en-US"/>
           </a:p>
@@ -2194,7 +2242,7 @@
           <a:p>
             <a:fld id="{BC2F845C-7F05-4F68-9CFE-E37358E7B32A}" type="datetimeFigureOut">
               <a:rPr lang="en-US" smtClean="0"/>
-              <a:t>8/2/2026</a:t>
+              <a:t>8/3/2026</a:t>
             </a:fld>
             <a:endParaRPr lang="en-US"/>
           </a:p>
@@ -2505,7 +2553,7 @@
           <a:p>
             <a:fld id="{BC2F845C-7F05-4F68-9CFE-E37358E7B32A}" type="datetimeFigureOut">
               <a:rPr lang="en-US" smtClean="0"/>
-              <a:t>8/2/2026</a:t>
+              <a:t>8/3/2026</a:t>
             </a:fld>
             <a:endParaRPr lang="en-US"/>
           </a:p>
@@ -2793,7 +2841,7 @@
           <a:p>
             <a:fld id="{BC2F845C-7F05-4F68-9CFE-E37358E7B32A}" type="datetimeFigureOut">
               <a:rPr lang="en-US" smtClean="0"/>
-              <a:t>8/2/2026</a:t>
+              <a:t>8/3/2026</a:t>
             </a:fld>
             <a:endParaRPr lang="en-US"/>
           </a:p>
@@ -3034,7 +3082,7 @@
           <a:p>
             <a:fld id="{BC2F845C-7F05-4F68-9CFE-E37358E7B32A}" type="datetimeFigureOut">
               <a:rPr lang="en-US" smtClean="0"/>
-              <a:t>8/2/2026</a:t>
+              <a:t>8/3/2026</a:t>
             </a:fld>
             <a:endParaRPr lang="en-US"/>
           </a:p>
@@ -3858,6 +3906,36 @@
           </a:p>
         </p:txBody>
       </p:sp>
+      <p:pic>
+        <p:nvPicPr>
+          <p:cNvPr id="5" name="Picture 4">
+            <a:extLst>
+              <a:ext uri="{FF2B5EF4-FFF2-40B4-BE49-F238E27FC236}">
+                <a16:creationId xmlns:a16="http://schemas.microsoft.com/office/drawing/2014/main" id="{556C57C0-11D9-DC98-B330-EFC97F5CD9C2}"/>
+              </a:ext>
+            </a:extLst>
+          </p:cNvPr>
+          <p:cNvPicPr>
+            <a:picLocks noChangeAspect="1"/>
+          </p:cNvPicPr>
+          <p:nvPr/>
+        </p:nvPicPr>
+        <p:blipFill>
+          <a:blip r:embed="rId2"/>
+          <a:stretch>
+            <a:fillRect/>
+          </a:stretch>
+        </p:blipFill>
+        <p:spPr>
+          <a:xfrm>
+            <a:off x="457204" y="4046758"/>
+            <a:ext cx="2796782" cy="2080440"/>
+          </a:xfrm>
+          <a:prstGeom prst="rect">
+            <a:avLst/>
+          </a:prstGeom>
+        </p:spPr>
+      </p:pic>
     </p:spTree>
     <p:extLst>
       <p:ext uri="{BB962C8B-B14F-4D97-AF65-F5344CB8AC3E}">
@@ -4066,6 +4144,96 @@
           </a:p>
         </p:txBody>
       </p:sp>
+      <p:pic>
+        <p:nvPicPr>
+          <p:cNvPr id="7" name="Picture 6">
+            <a:extLst>
+              <a:ext uri="{FF2B5EF4-FFF2-40B4-BE49-F238E27FC236}">
+                <a16:creationId xmlns:a16="http://schemas.microsoft.com/office/drawing/2014/main" id="{C0B1EBFB-3402-DF1C-19CE-6728BC79A800}"/>
+              </a:ext>
+            </a:extLst>
+          </p:cNvPr>
+          <p:cNvPicPr>
+            <a:picLocks noChangeAspect="1"/>
+          </p:cNvPicPr>
+          <p:nvPr/>
+        </p:nvPicPr>
+        <p:blipFill>
+          <a:blip r:embed="rId2"/>
+          <a:stretch>
+            <a:fillRect/>
+          </a:stretch>
+        </p:blipFill>
+        <p:spPr>
+          <a:xfrm>
+            <a:off x="4295153" y="1365372"/>
+            <a:ext cx="7239627" cy="1905165"/>
+          </a:xfrm>
+          <a:prstGeom prst="rect">
+            <a:avLst/>
+          </a:prstGeom>
+        </p:spPr>
+      </p:pic>
+      <p:pic>
+        <p:nvPicPr>
+          <p:cNvPr id="9" name="Picture 8">
+            <a:extLst>
+              <a:ext uri="{FF2B5EF4-FFF2-40B4-BE49-F238E27FC236}">
+                <a16:creationId xmlns:a16="http://schemas.microsoft.com/office/drawing/2014/main" id="{937C358A-190B-0D99-B173-8310536DBC55}"/>
+              </a:ext>
+            </a:extLst>
+          </p:cNvPr>
+          <p:cNvPicPr>
+            <a:picLocks noChangeAspect="1"/>
+          </p:cNvPicPr>
+          <p:nvPr/>
+        </p:nvPicPr>
+        <p:blipFill>
+          <a:blip r:embed="rId3"/>
+          <a:stretch>
+            <a:fillRect/>
+          </a:stretch>
+        </p:blipFill>
+        <p:spPr>
+          <a:xfrm>
+            <a:off x="2884484" y="3587464"/>
+            <a:ext cx="3368332" cy="1318374"/>
+          </a:xfrm>
+          <a:prstGeom prst="rect">
+            <a:avLst/>
+          </a:prstGeom>
+        </p:spPr>
+      </p:pic>
+      <p:pic>
+        <p:nvPicPr>
+          <p:cNvPr id="13" name="Picture 12">
+            <a:extLst>
+              <a:ext uri="{FF2B5EF4-FFF2-40B4-BE49-F238E27FC236}">
+                <a16:creationId xmlns:a16="http://schemas.microsoft.com/office/drawing/2014/main" id="{8092A3B9-4F82-28CF-76C8-55354A1C77EF}"/>
+              </a:ext>
+            </a:extLst>
+          </p:cNvPr>
+          <p:cNvPicPr>
+            <a:picLocks noChangeAspect="1"/>
+          </p:cNvPicPr>
+          <p:nvPr/>
+        </p:nvPicPr>
+        <p:blipFill>
+          <a:blip r:embed="rId4"/>
+          <a:stretch>
+            <a:fillRect/>
+          </a:stretch>
+        </p:blipFill>
+        <p:spPr>
+          <a:xfrm>
+            <a:off x="7307229" y="3525923"/>
+            <a:ext cx="4046571" cy="2415749"/>
+          </a:xfrm>
+          <a:prstGeom prst="rect">
+            <a:avLst/>
+          </a:prstGeom>
+        </p:spPr>
+      </p:pic>
     </p:spTree>
     <p:extLst>
       <p:ext uri="{BB962C8B-B14F-4D97-AF65-F5344CB8AC3E}">
